--- a/FinalProject-master/Presentation/Stock_Financial_Analysis_Final_With_PctChangeChart.pptx
+++ b/FinalProject-master/Presentation/Stock_Financial_Analysis_Final_With_PctChangeChart.pptx
@@ -995,13 +995,13 @@
                 <c:formatCode>General</c:formatCode>
                 <c:ptCount val="3"/>
                 <c:pt idx="0">
-                  <c:v>127</c:v>
+                  <c:v>62</c:v>
                 </c:pt>
                 <c:pt idx="1">
-                  <c:v>857</c:v>
+                  <c:v>46</c:v>
                 </c:pt>
                 <c:pt idx="2">
-                  <c:v>294</c:v>
+                  <c:v>13</c:v>
                 </c:pt>
               </c:numCache>
             </c:numRef>
@@ -14641,7 +14641,7 @@
             </a:r>
             <a:br/>
             <a:r>
-              <a:t>29/06/2025</a:t>
+              <a:t>17/07/2025</a:t>
             </a:r>
           </a:p>
         </p:txBody>
@@ -14768,7 +14768,7 @@
               <a:defRPr sz="1800"/>
             </a:pPr>
             <a:r>
-              <a:t>Company: Amazon.com, Inc.</a:t>
+              <a:t>Company: Amazon.com</a:t>
             </a:r>
           </a:p>
           <a:p>
@@ -14790,7 +14790,7 @@
               <a:defRPr sz="1800"/>
             </a:pPr>
             <a:r>
-              <a:t>Industry: E-commerce and Cloud Computing</a:t>
+              <a:t>Industry: E-commerce</a:t>
             </a:r>
           </a:p>
           <a:p>
